--- a/public/blog/presentations/semi-truck-accident-in-seattle-washington-what-to-do-2026.pptx
+++ b/public/blog/presentations/semi-truck-accident-in-seattle-washington-what-to-do-2026.pptx
@@ -515,7 +515,7 @@
           <a:lstStyle/>
           <a:p>
             <a:r>
-              <a:t>Educational presentation for Semi Truck Accident in Seattle, Washington: What to Do (2026). Full guide: https://www.wreckmatch.com/blog/semi-truck-accident-in-seattle-washington-what-to-do-2026. WreckMatch LLC legal referral service, not a law firm. WreckMatch LLC — legal referral service, not a law firm. Educational only. 800+ participating law firms. Call 855 WRECKMATCH. Reviewed for legal context by Judge Roy Waddell.</a:t>
+              <a:t>Educational presentation for Semi Truck Accident in Seattle, Washington: What to Do (2026). Full guide: https://www.wreckmatch.com/blog/semi-truck-accident-in-seattle-washington-what-to-do-2026. WreckMatch LLC legal referral service, not a law firm. WreckMatch LLC — legal referral service, not a law firm. Educational only. 800+ participating law firms. Call 855 WRECKMATCH. Reviewed for legal context by Hon. Ret. Judge Roy Waddell.</a:t>
             </a:r>
           </a:p>
         </p:txBody>
@@ -592,7 +592,7 @@
           <a:p/>
           <a:p>
             <a:r>
-              <a:t>Reviewed for legal context by Judge Roy Waddell, Legal Advisor at WreckMatch LLC — courtroom and procedural perspective only; not legal advice for your specific case.</a:t>
+              <a:t>Reviewed for legal context by Hon. Ret. Judge Roy Waddell, Legal Advisor at WreckMatch LLC — courtroom and procedural perspective only; not legal advice for your specific case.</a:t>
             </a:r>
           </a:p>
           <a:p/>
@@ -607,7 +607,7 @@
           <a:p/>
           <a:p>
             <a:r>
-              <a:t>At a glance: Washington fast facts: 3-year statute of limitations · Pure comparative fault rule · 25/50/10 minimum auto liability insurance. WreckMatch LLC — legal referral service, not a law firm. Educational only. 800+ participating law firms. Call 855 WRECKMATCH. Reviewed for legal context by Judge Roy Waddell.</a:t>
+              <a:t>At a glance: Washington fast facts: 3-year statute of limitations · Pure comparative fault rule · 25/50/10 minimum auto liability insurance. WreckMatch LLC — legal referral service, not a law firm. Educational only. 800+ participating law firms. Call 855 WRECKMATCH. Reviewed for legal context by Hon. Ret. Judge Roy Waddell.</a:t>
             </a:r>
           </a:p>
         </p:txBody>
@@ -695,7 +695,7 @@
           <a:p/>
           <a:p>
             <a:r>
-              <a:t>In Washington, deadlines and insuran WreckMatch LLC — legal referral service, not a law firm. Educational only. 800+ participating law firms. Call 855 WRECKMATCH. Reviewed for legal context by Judge Roy Waddell.</a:t>
+              <a:t>In Washington, deadlines and insuran WreckMatch LLC — legal referral service, not a law firm. Educational only. 800+ participating law firms. Call 855 WRECKMATCH. Reviewed for legal context by Hon. Ret. Judge Roy Waddell.</a:t>
             </a:r>
           </a:p>
         </p:txBody>
@@ -765,7 +765,7 @@
           <a:lstStyle/>
           <a:p>
             <a:r>
-              <a:t>Frequently asked questions WreckMatch LLC — legal referral service, not a law firm. Educational only. 800+ participating law firms. Call 855 WRECKMATCH. Reviewed for legal context by Judge Roy Waddell.</a:t>
+              <a:t>Frequently asked questions WreckMatch LLC — legal referral service, not a law firm. Educational only. 800+ participating law firms. Call 855 WRECKMATCH. Reviewed for legal context by Hon. Ret. Judge Roy Waddell.</a:t>
             </a:r>
           </a:p>
         </p:txBody>
@@ -835,7 +835,7 @@
           <a:lstStyle/>
           <a:p>
             <a:r>
-              <a:t>Get matched with a licensed attorney WreckMatch LLC — legal referral service, not a law firm. Educational only. 800+ participating law firms. Call 855 WRECKMATCH. Reviewed for legal context by Judge Roy Waddell.</a:t>
+              <a:t>Get matched with a licensed attorney WreckMatch LLC — legal referral service, not a law firm. Educational only. 800+ participating law firms. Call 855 WRECKMATCH. Reviewed for legal context by Hon. Ret. Judge Roy Waddell.</a:t>
             </a:r>
           </a:p>
         </p:txBody>
@@ -905,7 +905,7 @@
           <a:lstStyle/>
           <a:p>
             <a:r>
-              <a:t>Reviewed for legal context WreckMatch LLC — legal referral service, not a law firm. Educational only. 800+ participating law firms. Call 855 WRECKMATCH. Reviewed for legal context by Judge Roy Waddell.</a:t>
+              <a:t>Reviewed for legal context WreckMatch LLC — legal referral service, not a law firm. Educational only. 800+ participating law firms. Call 855 WRECKMATCH. Reviewed for legal context by Hon. Ret. Judge Roy Waddell.</a:t>
             </a:r>
           </a:p>
         </p:txBody>
@@ -975,7 +975,7 @@
           <a:lstStyle/>
           <a:p>
             <a:r>
-              <a:t>Important — read first WreckMatch LLC — legal referral service, not a law firm. Educational only. 800+ participating law firms. Call 855 WRECKMATCH. Reviewed for legal context by Judge Roy Waddell.</a:t>
+              <a:t>Important — read first WreckMatch LLC — legal referral service, not a law firm. Educational only. 800+ participating law firms. Call 855 WRECKMATCH. Reviewed for legal context by Hon. Ret. Judge Roy Waddell.</a:t>
             </a:r>
           </a:p>
         </p:txBody>
@@ -1045,7 +1045,7 @@
           <a:lstStyle/>
           <a:p>
             <a:r>
-              <a:t>After a semi truck or crash in Seattle, Washington, call 911, get medical care, preserve evidence including ECM/black box and carrier IDs, avoid recorded insurer statements, and use free attorney matching before signing anything. WreckMatch LLC — legal referral service, not a law firm. Educational only. 800+ participating law firms. Call 855 WRECKMATCH. Reviewed for legal context by Judge Roy Waddell.</a:t>
+              <a:t>After a semi truck or crash in Seattle, Washington, call 911, get medical care, preserve evidence including ECM/black box and carrier IDs, avoid recorded insurer statements, and use free attorney matching before signing anything. WreckMatch LLC — legal referral service, not a law firm. Educational only. 800+ participating law firms. Call 855 WRECKMATCH. Reviewed for legal context by Hon. Ret. Judge Roy Waddell.</a:t>
             </a:r>
           </a:p>
         </p:txBody>
@@ -1121,7 +1121,7 @@
           <a:p/>
           <a:p>
             <a:r>
-              <a:t>When you are ready, we connect you with licensed counsel in about 60 seconds. WreckMatch is a referral service, not a law firm. WreckMatch LLC — legal referral service, not a law firm. Educational only. 800+ participating law firms. Call 855 WRECKMATCH. Reviewed for legal context by Judge Roy Waddell.</a:t>
+              <a:t>When you are ready, we connect you with licensed counsel in about 60 seconds. WreckMatch is a referral service, not a law firm. WreckMatch LLC — legal referral service, not a law firm. Educational only. 800+ participating law firms. Call 855 WRECKMATCH. Reviewed for legal context by Hon. Ret. Judge Roy Waddell.</a:t>
             </a:r>
           </a:p>
         </p:txBody>
@@ -1216,7 +1216,7 @@
           </a:p>
           <a:p>
             <a:r>
-              <a:t>6. Get matched with a lawyer → WreckMatch LLC — legal referral service, not a law firm. Educational only. 800+ participating law firms. Call 855 WRECKMATCH. Reviewed for legal context by Judge Roy Waddell.</a:t>
+              <a:t>6. Get matched with a lawyer → WreckMatch LLC — legal referral service, not a law firm. Educational only. 800+ participating law firms. Call 855 WRECKMATCH. Reviewed for legal context by Hon. Ret. Judge Roy Waddell.</a:t>
             </a:r>
           </a:p>
         </p:txBody>
@@ -1317,7 +1317,7 @@
           <a:p/>
           <a:p>
             <a:r>
-              <a:t>Direct answer: Truck cases often involve multiple defendants (driver, motor carrier, broker, shipper). Your attorney may send spoliation letters immediately so electronic data is preserved. WreckMatch LLC — legal referral service, not a law firm. Educational only. 800+ participating law firms. Call 855 WRECKMATCH. Reviewed for legal context by Judge Roy Waddell.</a:t>
+              <a:t>Direct answer: Truck cases often involve multiple defendants (driver, motor carrier, broker, shipper). Your attorney may send spoliation letters immediately so electronic data is preserved. WreckMatch LLC — legal referral service, not a law firm. Educational only. 800+ participating law firms. Call 855 WRECKMATCH. Reviewed for legal context by Hon. Ret. Judge Roy Waddell.</a:t>
             </a:r>
           </a:p>
         </p:txBody>
@@ -1413,7 +1413,7 @@
           <a:p/>
           <a:p>
             <a:r>
-              <a:t>Insurers track filing deadlines closely. Missing a notice period can end a claim even when injuries are catastrophic. WreckMatch LLC — legal referral service, not a law firm. Educational only. 800+ participating law firms. Call 855 WRECKMATCH. Reviewed for legal context by Judge Roy Waddell.</a:t>
+              <a:t>Insurers track filing deadlines closely. Missing a notice period can end a claim even when injuries are catastrophic. WreckMatch LLC — legal referral service, not a law firm. Educational only. 800+ participating law firms. Call 855 WRECKMATCH. Reviewed for legal context by Hon. Ret. Judge Roy Waddell.</a:t>
             </a:r>
           </a:p>
         </p:txBody>
@@ -1498,7 +1498,7 @@
           </a:p>
           <a:p>
             <a:r>
-              <a:t>- Multiple policies pointing blame at each other (especially in truck and multi-vehicle crashes) WreckMatch LLC — legal referral service, not a law firm. Educational only. 800+ participating law firms. Call 855 WRECKMATCH. Reviewed for legal context by Judge Roy Waddell.</a:t>
+              <a:t>- Multiple policies pointing blame at each other (especially in truck and multi-vehicle crashes) WreckMatch LLC — legal referral service, not a law firm. Educational only. 800+ participating law firms. Call 855 WRECKMATCH. Reviewed for legal context by Hon. Ret. Judge Roy Waddell.</a:t>
             </a:r>
           </a:p>
         </p:txBody>
@@ -1568,7 +1568,7 @@
           <a:lstStyle/>
           <a:p>
             <a:r>
-              <a:t>Consider a free consultation if: hospitalization occurred, fault is disputed, a commercial truck was involved, a death occurred, or an insurer already denied coverage. WreckMatch connects you with participating licensed attorneys — we do not provide legal advice ourselves. WreckMatch LLC — legal referral service, not a law firm. Educational only. 800+ participating law firms. Call 855 WRECKMATCH. Reviewed for legal context by Judge Roy Waddell.</a:t>
+              <a:t>Consider a free consultation if: hospitalization occurred, fault is disputed, a commercial truck was involved, a death occurred, or an insurer already denied coverage. WreckMatch connects you with participating licensed attorneys — we do not provide legal advice ourselves. WreckMatch LLC — legal referral service, not a law firm. Educational only. 800+ participating law firms. Call 855 WRECKMATCH. Reviewed for legal context by Hon. Ret. Judge Roy Waddell.</a:t>
             </a:r>
           </a:p>
         </p:txBody>
@@ -4662,7 +4662,7 @@
               </a:defRPr>
             </a:pPr>
             <a:r>
-              <a:t>Truck Accidents · Washington · 2026-05-30</a:t>
+              <a:t>Truck Accidents · Washington · 2026-05-31</a:t>
             </a:r>
           </a:p>
         </p:txBody>

--- a/public/blog/presentations/semi-truck-accident-in-seattle-washington-what-to-do-2026.pptx
+++ b/public/blog/presentations/semi-truck-accident-in-seattle-washington-what-to-do-2026.pptx
@@ -592,7 +592,7 @@
           <a:p/>
           <a:p>
             <a:r>
-              <a:t>Reviewed for legal context by Hon. Ret. Judge Roy Waddell, Legal Advisor at WreckMatch LLC — courtroom and procedural perspective only; not legal advice for your specific case.</a:t>
+              <a:t>Reviewed for legal context by Judge Roy Waddell, Legal Advisor at WreckMatch LLC — courtroom and procedural perspective only; not legal advice for your specific case.</a:t>
             </a:r>
           </a:p>
           <a:p/>
@@ -4662,7 +4662,7 @@
               </a:defRPr>
             </a:pPr>
             <a:r>
-              <a:t>Truck Accidents · Washington · 2026-05-31</a:t>
+              <a:t>Truck Accidents · Washington · 2026-05-30</a:t>
             </a:r>
           </a:p>
         </p:txBody>
